--- a/session1/exam-strategy/q1/q1_exam_strategy.pptx
+++ b/session1/exam-strategy/q1/q1_exam_strategy.pptx
@@ -3189,8 +3189,8 @@
         </p:nvSpPr>
         <p:spPr>
           <a:xfrm>
-            <a:off x="274320" y="685800"/>
-            <a:ext cx="6400800" cy="1645920"/>
+            <a:off x="274320" y="640080"/>
+            <a:ext cx="6583680" cy="1280160"/>
           </a:xfrm>
           <a:prstGeom prst="rect">
             <a:avLst/>
@@ -3198,13 +3198,13 @@
           <a:noFill/>
         </p:spPr>
         <p:txBody>
-          <a:bodyPr wrap="square">
+          <a:bodyPr wrap="square" tIns="0" bIns="0">
             <a:spAutoFit/>
           </a:bodyPr>
           <a:lstStyle/>
           <a:p>
             <a:pPr>
-              <a:defRPr sz="1100">
+              <a:defRPr sz="900">
                 <a:solidFill>
                   <a:srgbClr val="FFFFFF"/>
                 </a:solidFill>
@@ -3212,7 +3212,7 @@
               </a:defRPr>
             </a:pPr>
             <a:r>
-              <a:t>As a developer you are tasked with creating an application so that your customers can leverage your microservices by making HTTP API calls. Your goal is to create an event-driven architecture to support this application. What combination of AWS Services can you use so that your customers can make the HTTP API calls, serverless compute containing the business logic processes the incoming API calls, and the corresponding microservices data can be persistently stored? (SELECT THREE)</a:t>
+              <a:t>As a developer you are tasked with creating an application so that your customers can leverage your microservices by making HTTP API calls. Your goal is to create an event-driven architecture to support this application. What combination of AWS Services can you use so that your customers can make the HTTP API calls, serverless compute containing...</a:t>
             </a:r>
           </a:p>
         </p:txBody>
@@ -3225,8 +3225,8 @@
         </p:nvSpPr>
         <p:spPr>
           <a:xfrm>
-            <a:off x="365760" y="2377440"/>
-            <a:ext cx="274320" cy="274320"/>
+            <a:off x="274320" y="2057400"/>
+            <a:ext cx="201168" cy="201168"/>
           </a:xfrm>
           <a:prstGeom prst="ellipse">
             <a:avLst/>
@@ -3257,7 +3257,7 @@
           <a:lstStyle/>
           <a:p>
             <a:pPr algn="ctr">
-              <a:defRPr sz="900" b="1">
+              <a:defRPr sz="700" b="1">
                 <a:solidFill>
                   <a:srgbClr val="FFFFFF"/>
                 </a:solidFill>
@@ -3277,8 +3277,8 @@
         </p:nvSpPr>
         <p:spPr>
           <a:xfrm>
-            <a:off x="777240" y="2377440"/>
-            <a:ext cx="5943600" cy="411480"/>
+            <a:off x="548640" y="2011680"/>
+            <a:ext cx="6400800" cy="484631"/>
           </a:xfrm>
           <a:prstGeom prst="rect">
             <a:avLst/>
@@ -3286,13 +3286,13 @@
           <a:noFill/>
         </p:spPr>
         <p:txBody>
-          <a:bodyPr wrap="square">
+          <a:bodyPr wrap="square" tIns="25400" bIns="0" lIns="0">
             <a:spAutoFit/>
           </a:bodyPr>
           <a:lstStyle/>
           <a:p>
             <a:pPr>
-              <a:defRPr sz="1000">
+              <a:defRPr sz="800">
                 <a:solidFill>
                   <a:srgbClr val="CCCCCC"/>
                 </a:solidFill>
@@ -3313,8 +3313,8 @@
         </p:nvSpPr>
         <p:spPr>
           <a:xfrm>
-            <a:off x="365760" y="2834640"/>
-            <a:ext cx="274320" cy="274320"/>
+            <a:off x="274320" y="2560320"/>
+            <a:ext cx="201168" cy="201168"/>
           </a:xfrm>
           <a:prstGeom prst="ellipse">
             <a:avLst/>
@@ -3345,7 +3345,7 @@
           <a:lstStyle/>
           <a:p>
             <a:pPr algn="ctr">
-              <a:defRPr sz="900" b="1">
+              <a:defRPr sz="700" b="1">
                 <a:solidFill>
                   <a:srgbClr val="FFFFFF"/>
                 </a:solidFill>
@@ -3365,8 +3365,8 @@
         </p:nvSpPr>
         <p:spPr>
           <a:xfrm>
-            <a:off x="777240" y="2834640"/>
-            <a:ext cx="5943600" cy="411480"/>
+            <a:off x="548640" y="2514600"/>
+            <a:ext cx="6400800" cy="484631"/>
           </a:xfrm>
           <a:prstGeom prst="rect">
             <a:avLst/>
@@ -3374,13 +3374,13 @@
           <a:noFill/>
         </p:spPr>
         <p:txBody>
-          <a:bodyPr wrap="square">
+          <a:bodyPr wrap="square" tIns="25400" bIns="0" lIns="0">
             <a:spAutoFit/>
           </a:bodyPr>
           <a:lstStyle/>
           <a:p>
             <a:pPr>
-              <a:defRPr sz="1000">
+              <a:defRPr sz="800">
                 <a:solidFill>
                   <a:srgbClr val="CCCCCC"/>
                 </a:solidFill>
@@ -3401,8 +3401,8 @@
         </p:nvSpPr>
         <p:spPr>
           <a:xfrm>
-            <a:off x="365760" y="3291840"/>
-            <a:ext cx="274320" cy="274320"/>
+            <a:off x="274320" y="3063239"/>
+            <a:ext cx="201168" cy="201168"/>
           </a:xfrm>
           <a:prstGeom prst="ellipse">
             <a:avLst/>
@@ -3433,7 +3433,7 @@
           <a:lstStyle/>
           <a:p>
             <a:pPr algn="ctr">
-              <a:defRPr sz="900" b="1">
+              <a:defRPr sz="700" b="1">
                 <a:solidFill>
                   <a:srgbClr val="FFFFFF"/>
                 </a:solidFill>
@@ -3453,8 +3453,8 @@
         </p:nvSpPr>
         <p:spPr>
           <a:xfrm>
-            <a:off x="777240" y="3291840"/>
-            <a:ext cx="5943600" cy="411480"/>
+            <a:off x="548640" y="3017520"/>
+            <a:ext cx="6400800" cy="484631"/>
           </a:xfrm>
           <a:prstGeom prst="rect">
             <a:avLst/>
@@ -3462,13 +3462,13 @@
           <a:noFill/>
         </p:spPr>
         <p:txBody>
-          <a:bodyPr wrap="square">
+          <a:bodyPr wrap="square" tIns="25400" bIns="0" lIns="0">
             <a:spAutoFit/>
           </a:bodyPr>
           <a:lstStyle/>
           <a:p>
             <a:pPr>
-              <a:defRPr sz="1000">
+              <a:defRPr sz="800">
                 <a:solidFill>
                   <a:srgbClr val="CCCCCC"/>
                 </a:solidFill>
@@ -3489,8 +3489,8 @@
         </p:nvSpPr>
         <p:spPr>
           <a:xfrm>
-            <a:off x="365760" y="3749039"/>
-            <a:ext cx="274320" cy="274320"/>
+            <a:off x="274320" y="3566160"/>
+            <a:ext cx="201168" cy="201168"/>
           </a:xfrm>
           <a:prstGeom prst="ellipse">
             <a:avLst/>
@@ -3521,7 +3521,7 @@
           <a:lstStyle/>
           <a:p>
             <a:pPr algn="ctr">
-              <a:defRPr sz="900" b="1">
+              <a:defRPr sz="700" b="1">
                 <a:solidFill>
                   <a:srgbClr val="FFFFFF"/>
                 </a:solidFill>
@@ -3541,8 +3541,8 @@
         </p:nvSpPr>
         <p:spPr>
           <a:xfrm>
-            <a:off x="777240" y="3749039"/>
-            <a:ext cx="5943600" cy="411480"/>
+            <a:off x="548640" y="3520440"/>
+            <a:ext cx="6400800" cy="484631"/>
           </a:xfrm>
           <a:prstGeom prst="rect">
             <a:avLst/>
@@ -3550,13 +3550,13 @@
           <a:noFill/>
         </p:spPr>
         <p:txBody>
-          <a:bodyPr wrap="square">
+          <a:bodyPr wrap="square" tIns="25400" bIns="0" lIns="0">
             <a:spAutoFit/>
           </a:bodyPr>
           <a:lstStyle/>
           <a:p>
             <a:pPr>
-              <a:defRPr sz="1000">
+              <a:defRPr sz="800">
                 <a:solidFill>
                   <a:srgbClr val="CCCCCC"/>
                 </a:solidFill>
@@ -3577,8 +3577,8 @@
         </p:nvSpPr>
         <p:spPr>
           <a:xfrm>
-            <a:off x="365760" y="4206240"/>
-            <a:ext cx="274320" cy="274320"/>
+            <a:off x="274320" y="4069080"/>
+            <a:ext cx="201168" cy="201168"/>
           </a:xfrm>
           <a:prstGeom prst="ellipse">
             <a:avLst/>
@@ -3609,7 +3609,7 @@
           <a:lstStyle/>
           <a:p>
             <a:pPr algn="ctr">
-              <a:defRPr sz="900" b="1">
+              <a:defRPr sz="700" b="1">
                 <a:solidFill>
                   <a:srgbClr val="FFFFFF"/>
                 </a:solidFill>
@@ -3629,8 +3629,8 @@
         </p:nvSpPr>
         <p:spPr>
           <a:xfrm>
-            <a:off x="777240" y="4206240"/>
-            <a:ext cx="5943600" cy="411480"/>
+            <a:off x="548640" y="4023360"/>
+            <a:ext cx="6400800" cy="484631"/>
           </a:xfrm>
           <a:prstGeom prst="rect">
             <a:avLst/>
@@ -3638,13 +3638,13 @@
           <a:noFill/>
         </p:spPr>
         <p:txBody>
-          <a:bodyPr wrap="square">
+          <a:bodyPr wrap="square" tIns="25400" bIns="0" lIns="0">
             <a:spAutoFit/>
           </a:bodyPr>
           <a:lstStyle/>
           <a:p>
             <a:pPr>
-              <a:defRPr sz="1000">
+              <a:defRPr sz="800">
                 <a:solidFill>
                   <a:srgbClr val="CCCCCC"/>
                 </a:solidFill>
@@ -3665,8 +3665,8 @@
         </p:nvSpPr>
         <p:spPr>
           <a:xfrm>
-            <a:off x="365760" y="4663440"/>
-            <a:ext cx="274320" cy="274320"/>
+            <a:off x="274320" y="4571999"/>
+            <a:ext cx="201168" cy="201168"/>
           </a:xfrm>
           <a:prstGeom prst="ellipse">
             <a:avLst/>
@@ -3697,7 +3697,7 @@
           <a:lstStyle/>
           <a:p>
             <a:pPr algn="ctr">
-              <a:defRPr sz="900" b="1">
+              <a:defRPr sz="700" b="1">
                 <a:solidFill>
                   <a:srgbClr val="FFFFFF"/>
                 </a:solidFill>
@@ -3717,8 +3717,8 @@
         </p:nvSpPr>
         <p:spPr>
           <a:xfrm>
-            <a:off x="777240" y="4663440"/>
-            <a:ext cx="5943600" cy="411480"/>
+            <a:off x="548640" y="4526279"/>
+            <a:ext cx="6400800" cy="484631"/>
           </a:xfrm>
           <a:prstGeom prst="rect">
             <a:avLst/>
@@ -3726,13 +3726,13 @@
           <a:noFill/>
         </p:spPr>
         <p:txBody>
-          <a:bodyPr wrap="square">
+          <a:bodyPr wrap="square" tIns="25400" bIns="0" lIns="0">
             <a:spAutoFit/>
           </a:bodyPr>
           <a:lstStyle/>
           <a:p>
             <a:pPr>
-              <a:defRPr sz="1000">
+              <a:defRPr sz="800">
                 <a:solidFill>
                   <a:srgbClr val="CCCCCC"/>
                 </a:solidFill>
@@ -4022,8 +4022,8 @@
         </p:blipFill>
         <p:spPr>
           <a:xfrm>
-            <a:off x="182880" y="914400"/>
-            <a:ext cx="5280660" cy="3840480"/>
+            <a:off x="182880" y="1276869"/>
+            <a:ext cx="5303520" cy="3115540"/>
           </a:xfrm>
           <a:prstGeom prst="rect">
             <a:avLst/>
@@ -4158,9 +4158,9 @@
           <a:p>
             <a:pPr>
               <a:spcAft>
-                <a:spcPts val="600"/>
+                <a:spcPts val="400"/>
               </a:spcAft>
-              <a:defRPr sz="900">
+              <a:defRPr sz="800">
                 <a:solidFill>
                   <a:srgbClr val="212121"/>
                 </a:solidFill>
@@ -4168,7 +4168,23 @@
               </a:defRPr>
             </a:pPr>
             <a:r>
-              <a:t>• While Amazon CloudWatch is a monitoring service for AWS resources and applications, it is not directly related to creating an event-driven architecture for handling HTTP API calls and persistently storing microservices data.</a:t>
+              <a:t>• While Amazon CloudWatch is a monitoring service for AWS resources and applications</a:t>
+            </a:r>
+          </a:p>
+          <a:p>
+            <a:pPr>
+              <a:spcAft>
+                <a:spcPts val="400"/>
+              </a:spcAft>
+              <a:defRPr sz="800">
+                <a:solidFill>
+                  <a:srgbClr val="212121"/>
+                </a:solidFill>
+                <a:latin typeface="Segoe UI"/>
+              </a:defRPr>
+            </a:pPr>
+            <a:r>
+              <a:t>• Not directly related to creating an event-driven architecture for handling HTTP API calls and persistently storing microservices data</a:t>
             </a:r>
           </a:p>
         </p:txBody>
@@ -4347,8 +4363,8 @@
         </p:blipFill>
         <p:spPr>
           <a:xfrm>
-            <a:off x="182880" y="914400"/>
-            <a:ext cx="5280660" cy="3840480"/>
+            <a:off x="182880" y="2000378"/>
+            <a:ext cx="5303520" cy="1668523"/>
           </a:xfrm>
           <a:prstGeom prst="rect">
             <a:avLst/>
@@ -4483,9 +4499,9 @@
           <a:p>
             <a:pPr>
               <a:spcAft>
-                <a:spcPts val="600"/>
+                <a:spcPts val="400"/>
               </a:spcAft>
-              <a:defRPr sz="900">
+              <a:defRPr sz="800">
                 <a:solidFill>
                   <a:srgbClr val="212121"/>
                 </a:solidFill>
@@ -4493,15 +4509,15 @@
               </a:defRPr>
             </a:pPr>
             <a:r>
-              <a:t>• Amazon API Gateway allows you to create, publish, maintain, monitor, and secure APIs at any scale.</a:t>
+              <a:t>• Amazon API Gateway allows you to create, publish, maintain, monitor, and secure APIs at any scale</a:t>
             </a:r>
           </a:p>
           <a:p>
             <a:pPr>
               <a:spcAft>
-                <a:spcPts val="600"/>
+                <a:spcPts val="400"/>
               </a:spcAft>
-              <a:defRPr sz="900">
+              <a:defRPr sz="800">
                 <a:solidFill>
                   <a:srgbClr val="212121"/>
                 </a:solidFill>
@@ -4509,7 +4525,7 @@
               </a:defRPr>
             </a:pPr>
             <a:r>
-              <a:t>• It enables customers to make HTTP API calls to interact with your application.</a:t>
+              <a:t>• It enables customers to make HTTP API calls to interact with your application</a:t>
             </a:r>
           </a:p>
         </p:txBody>
@@ -4688,8 +4704,8 @@
         </p:blipFill>
         <p:spPr>
           <a:xfrm>
-            <a:off x="182880" y="914400"/>
-            <a:ext cx="5280660" cy="3840480"/>
+            <a:off x="182880" y="1049357"/>
+            <a:ext cx="5303520" cy="3570564"/>
           </a:xfrm>
           <a:prstGeom prst="rect">
             <a:avLst/>
@@ -4824,9 +4840,9 @@
           <a:p>
             <a:pPr>
               <a:spcAft>
-                <a:spcPts val="600"/>
+                <a:spcPts val="400"/>
               </a:spcAft>
-              <a:defRPr sz="900">
+              <a:defRPr sz="800">
                 <a:solidFill>
                   <a:srgbClr val="212121"/>
                 </a:solidFill>
@@ -4834,15 +4850,15 @@
               </a:defRPr>
             </a:pPr>
             <a:r>
-              <a:t>• AWS Secrets Manager is a service that helps you protect access to your applications, services, and IT resources.</a:t>
+              <a:t>• AWS Secrets Manager is a service that helps you protect access to your applications, services, and IT resources</a:t>
             </a:r>
           </a:p>
           <a:p>
             <a:pPr>
               <a:spcAft>
-                <a:spcPts val="600"/>
+                <a:spcPts val="400"/>
               </a:spcAft>
-              <a:defRPr sz="900">
+              <a:defRPr sz="800">
                 <a:solidFill>
                   <a:srgbClr val="212121"/>
                 </a:solidFill>
@@ -4850,7 +4866,23 @@
               </a:defRPr>
             </a:pPr>
             <a:r>
-              <a:t>• While it plays a crucial role in managing secrets, it is not directly involved in creating an event-driven architecture for handling HTTP API calls and persistently storing microservices data.</a:t>
+              <a:t>• While it plays a crucial role in managing secrets</a:t>
+            </a:r>
+          </a:p>
+          <a:p>
+            <a:pPr>
+              <a:spcAft>
+                <a:spcPts val="400"/>
+              </a:spcAft>
+              <a:defRPr sz="800">
+                <a:solidFill>
+                  <a:srgbClr val="212121"/>
+                </a:solidFill>
+                <a:latin typeface="Segoe UI"/>
+              </a:defRPr>
+            </a:pPr>
+            <a:r>
+              <a:t>• Not directly involved in creating an event-driven architecture for handling HTTP API calls and persistently storing microservices data</a:t>
             </a:r>
           </a:p>
         </p:txBody>
@@ -5029,8 +5061,8 @@
         </p:blipFill>
         <p:spPr>
           <a:xfrm>
-            <a:off x="182880" y="914400"/>
-            <a:ext cx="5280660" cy="3840480"/>
+            <a:off x="182880" y="2039679"/>
+            <a:ext cx="5303520" cy="1589920"/>
           </a:xfrm>
           <a:prstGeom prst="rect">
             <a:avLst/>
@@ -5165,9 +5197,9 @@
           <a:p>
             <a:pPr>
               <a:spcAft>
-                <a:spcPts val="600"/>
+                <a:spcPts val="400"/>
               </a:spcAft>
-              <a:defRPr sz="900">
+              <a:defRPr sz="800">
                 <a:solidFill>
                   <a:srgbClr val="212121"/>
                 </a:solidFill>
@@ -5175,15 +5207,15 @@
               </a:defRPr>
             </a:pPr>
             <a:r>
-              <a:t>• Amazon DynamoDB is a fully managed NoSQL database service that provides fast and predictable performance with seamless scalability.</a:t>
+              <a:t>• Amazon DynamoDB is a fully managed NoSQL database service that provides fast and predictable performance with seamless scalability</a:t>
             </a:r>
           </a:p>
           <a:p>
             <a:pPr>
               <a:spcAft>
-                <a:spcPts val="600"/>
+                <a:spcPts val="400"/>
               </a:spcAft>
-              <a:defRPr sz="900">
+              <a:defRPr sz="800">
                 <a:solidFill>
                   <a:srgbClr val="212121"/>
                 </a:solidFill>
@@ -5191,7 +5223,7 @@
               </a:defRPr>
             </a:pPr>
             <a:r>
-              <a:t>• It can persistently store the microservices data.</a:t>
+              <a:t>• It can persistently store the microservices data</a:t>
             </a:r>
           </a:p>
         </p:txBody>
@@ -5370,8 +5402,8 @@
         </p:blipFill>
         <p:spPr>
           <a:xfrm>
-            <a:off x="182880" y="914400"/>
-            <a:ext cx="3115683" cy="3840480"/>
+            <a:off x="182880" y="1974762"/>
+            <a:ext cx="5303520" cy="1719755"/>
           </a:xfrm>
           <a:prstGeom prst="rect">
             <a:avLst/>
@@ -5506,9 +5538,9 @@
           <a:p>
             <a:pPr>
               <a:spcAft>
-                <a:spcPts val="600"/>
+                <a:spcPts val="400"/>
               </a:spcAft>
-              <a:defRPr sz="900">
+              <a:defRPr sz="800">
                 <a:solidFill>
                   <a:srgbClr val="212121"/>
                 </a:solidFill>
@@ -5516,15 +5548,15 @@
               </a:defRPr>
             </a:pPr>
             <a:r>
-              <a:t>• AWS Lambda is a serverless compute service that runs your code in response to events and automatically scales to handle them.</a:t>
+              <a:t>• AWS Lambda is a serverless compute service that runs your code in response to events and automatically scales to handle them</a:t>
             </a:r>
           </a:p>
           <a:p>
             <a:pPr>
               <a:spcAft>
-                <a:spcPts val="600"/>
+                <a:spcPts val="400"/>
               </a:spcAft>
-              <a:defRPr sz="900">
+              <a:defRPr sz="800">
                 <a:solidFill>
                   <a:srgbClr val="212121"/>
                 </a:solidFill>
@@ -5532,7 +5564,7 @@
               </a:defRPr>
             </a:pPr>
             <a:r>
-              <a:t>• It can contain the business logic processes for handling the incoming API calls without provisioning or managing servers.</a:t>
+              <a:t>• It can contain the business logic processes for handling the incoming API calls without provisioning or managing servers</a:t>
             </a:r>
           </a:p>
         </p:txBody>
@@ -5711,8 +5743,8 @@
         </p:blipFill>
         <p:spPr>
           <a:xfrm>
-            <a:off x="182880" y="914400"/>
-            <a:ext cx="5280660" cy="3840480"/>
+            <a:off x="182880" y="1108534"/>
+            <a:ext cx="5303520" cy="3452211"/>
           </a:xfrm>
           <a:prstGeom prst="rect">
             <a:avLst/>
@@ -5847,9 +5879,9 @@
           <a:p>
             <a:pPr>
               <a:spcAft>
-                <a:spcPts val="600"/>
+                <a:spcPts val="400"/>
               </a:spcAft>
-              <a:defRPr sz="900">
+              <a:defRPr sz="800">
                 <a:solidFill>
                   <a:srgbClr val="212121"/>
                 </a:solidFill>
@@ -5857,15 +5889,15 @@
               </a:defRPr>
             </a:pPr>
             <a:r>
-              <a:t>• AWS Elastic Beanstalk is an easy-to-use service for deploying and scaling web applications and services.</a:t>
+              <a:t>• AWS Elastic Beanstalk is an easy-to-use service for deploying and scaling web applications and services</a:t>
             </a:r>
           </a:p>
           <a:p>
             <a:pPr>
               <a:spcAft>
-                <a:spcPts val="600"/>
+                <a:spcPts val="400"/>
               </a:spcAft>
-              <a:defRPr sz="900">
+              <a:defRPr sz="800">
                 <a:solidFill>
                   <a:srgbClr val="212121"/>
                 </a:solidFill>
@@ -5873,7 +5905,7 @@
               </a:defRPr>
             </a:pPr>
             <a:r>
-              <a:t>• However, it is not specifically designed for creating event-driven architectures or handling HTTP API calls and persistently storing microservices data in a serverless manner.</a:t>
+              <a:t>• Not specifically designed for creating event-driven architectures or handling HTTP API calls and persistently storing microservices data in a serverless manner</a:t>
             </a:r>
           </a:p>
         </p:txBody>

--- a/session1/exam-strategy/q1/q1_exam_strategy.pptx
+++ b/session1/exam-strategy/q1/q1_exam_strategy.pptx
@@ -3189,8 +3189,8 @@
         </p:nvSpPr>
         <p:spPr>
           <a:xfrm>
-            <a:off x="274320" y="640080"/>
-            <a:ext cx="6583680" cy="1280160"/>
+            <a:off x="274320" y="685800"/>
+            <a:ext cx="6400800" cy="1645920"/>
           </a:xfrm>
           <a:prstGeom prst="rect">
             <a:avLst/>
@@ -3198,13 +3198,13 @@
           <a:noFill/>
         </p:spPr>
         <p:txBody>
-          <a:bodyPr wrap="square" tIns="0" bIns="0">
+          <a:bodyPr wrap="square">
             <a:spAutoFit/>
           </a:bodyPr>
           <a:lstStyle/>
           <a:p>
             <a:pPr>
-              <a:defRPr sz="900">
+              <a:defRPr sz="1100">
                 <a:solidFill>
                   <a:srgbClr val="FFFFFF"/>
                 </a:solidFill>
@@ -3212,7 +3212,7 @@
               </a:defRPr>
             </a:pPr>
             <a:r>
-              <a:t>As a developer you are tasked with creating an application so that your customers can leverage your microservices by making HTTP API calls. Your goal is to create an event-driven architecture to support this application. What combination of AWS Services can you use so that your customers can make the HTTP API calls, serverless compute containing...</a:t>
+              <a:t>As a developer you are tasked with creating an application so that your customers can leverage your microservices by making HTTP API calls. Your goal is to create an event-driven architecture to support this application. What combination of AWS Services can you use so that your customers can make the HTTP API calls, serverless compute containing the business logic processes the incoming API calls, and the corresponding microservices data can be persistently stored? (SELECT THREE)</a:t>
             </a:r>
           </a:p>
         </p:txBody>
@@ -3225,8 +3225,8 @@
         </p:nvSpPr>
         <p:spPr>
           <a:xfrm>
-            <a:off x="274320" y="2057400"/>
-            <a:ext cx="201168" cy="201168"/>
+            <a:off x="365760" y="2377440"/>
+            <a:ext cx="274320" cy="274320"/>
           </a:xfrm>
           <a:prstGeom prst="ellipse">
             <a:avLst/>
@@ -3257,7 +3257,7 @@
           <a:lstStyle/>
           <a:p>
             <a:pPr algn="ctr">
-              <a:defRPr sz="700" b="1">
+              <a:defRPr sz="900" b="1">
                 <a:solidFill>
                   <a:srgbClr val="FFFFFF"/>
                 </a:solidFill>
@@ -3277,8 +3277,8 @@
         </p:nvSpPr>
         <p:spPr>
           <a:xfrm>
-            <a:off x="548640" y="2011680"/>
-            <a:ext cx="6400800" cy="484631"/>
+            <a:off x="777240" y="2377440"/>
+            <a:ext cx="5943600" cy="411480"/>
           </a:xfrm>
           <a:prstGeom prst="rect">
             <a:avLst/>
@@ -3286,13 +3286,13 @@
           <a:noFill/>
         </p:spPr>
         <p:txBody>
-          <a:bodyPr wrap="square" tIns="25400" bIns="0" lIns="0">
+          <a:bodyPr wrap="square">
             <a:spAutoFit/>
           </a:bodyPr>
           <a:lstStyle/>
           <a:p>
             <a:pPr>
-              <a:defRPr sz="800">
+              <a:defRPr sz="1000">
                 <a:solidFill>
                   <a:srgbClr val="CCCCCC"/>
                 </a:solidFill>
@@ -3313,8 +3313,8 @@
         </p:nvSpPr>
         <p:spPr>
           <a:xfrm>
-            <a:off x="274320" y="2560320"/>
-            <a:ext cx="201168" cy="201168"/>
+            <a:off x="365760" y="2834640"/>
+            <a:ext cx="274320" cy="274320"/>
           </a:xfrm>
           <a:prstGeom prst="ellipse">
             <a:avLst/>
@@ -3345,7 +3345,7 @@
           <a:lstStyle/>
           <a:p>
             <a:pPr algn="ctr">
-              <a:defRPr sz="700" b="1">
+              <a:defRPr sz="900" b="1">
                 <a:solidFill>
                   <a:srgbClr val="FFFFFF"/>
                 </a:solidFill>
@@ -3365,8 +3365,8 @@
         </p:nvSpPr>
         <p:spPr>
           <a:xfrm>
-            <a:off x="548640" y="2514600"/>
-            <a:ext cx="6400800" cy="484631"/>
+            <a:off x="777240" y="2834640"/>
+            <a:ext cx="5943600" cy="411480"/>
           </a:xfrm>
           <a:prstGeom prst="rect">
             <a:avLst/>
@@ -3374,13 +3374,13 @@
           <a:noFill/>
         </p:spPr>
         <p:txBody>
-          <a:bodyPr wrap="square" tIns="25400" bIns="0" lIns="0">
+          <a:bodyPr wrap="square">
             <a:spAutoFit/>
           </a:bodyPr>
           <a:lstStyle/>
           <a:p>
             <a:pPr>
-              <a:defRPr sz="800">
+              <a:defRPr sz="1000">
                 <a:solidFill>
                   <a:srgbClr val="CCCCCC"/>
                 </a:solidFill>
@@ -3401,8 +3401,8 @@
         </p:nvSpPr>
         <p:spPr>
           <a:xfrm>
-            <a:off x="274320" y="3063239"/>
-            <a:ext cx="201168" cy="201168"/>
+            <a:off x="365760" y="3291840"/>
+            <a:ext cx="274320" cy="274320"/>
           </a:xfrm>
           <a:prstGeom prst="ellipse">
             <a:avLst/>
@@ -3433,7 +3433,7 @@
           <a:lstStyle/>
           <a:p>
             <a:pPr algn="ctr">
-              <a:defRPr sz="700" b="1">
+              <a:defRPr sz="900" b="1">
                 <a:solidFill>
                   <a:srgbClr val="FFFFFF"/>
                 </a:solidFill>
@@ -3453,8 +3453,8 @@
         </p:nvSpPr>
         <p:spPr>
           <a:xfrm>
-            <a:off x="548640" y="3017520"/>
-            <a:ext cx="6400800" cy="484631"/>
+            <a:off x="777240" y="3291840"/>
+            <a:ext cx="5943600" cy="411480"/>
           </a:xfrm>
           <a:prstGeom prst="rect">
             <a:avLst/>
@@ -3462,13 +3462,13 @@
           <a:noFill/>
         </p:spPr>
         <p:txBody>
-          <a:bodyPr wrap="square" tIns="25400" bIns="0" lIns="0">
+          <a:bodyPr wrap="square">
             <a:spAutoFit/>
           </a:bodyPr>
           <a:lstStyle/>
           <a:p>
             <a:pPr>
-              <a:defRPr sz="800">
+              <a:defRPr sz="1000">
                 <a:solidFill>
                   <a:srgbClr val="CCCCCC"/>
                 </a:solidFill>
@@ -3489,8 +3489,8 @@
         </p:nvSpPr>
         <p:spPr>
           <a:xfrm>
-            <a:off x="274320" y="3566160"/>
-            <a:ext cx="201168" cy="201168"/>
+            <a:off x="365760" y="3749039"/>
+            <a:ext cx="274320" cy="274320"/>
           </a:xfrm>
           <a:prstGeom prst="ellipse">
             <a:avLst/>
@@ -3521,7 +3521,7 @@
           <a:lstStyle/>
           <a:p>
             <a:pPr algn="ctr">
-              <a:defRPr sz="700" b="1">
+              <a:defRPr sz="900" b="1">
                 <a:solidFill>
                   <a:srgbClr val="FFFFFF"/>
                 </a:solidFill>
@@ -3541,8 +3541,8 @@
         </p:nvSpPr>
         <p:spPr>
           <a:xfrm>
-            <a:off x="548640" y="3520440"/>
-            <a:ext cx="6400800" cy="484631"/>
+            <a:off x="777240" y="3749039"/>
+            <a:ext cx="5943600" cy="411480"/>
           </a:xfrm>
           <a:prstGeom prst="rect">
             <a:avLst/>
@@ -3550,13 +3550,13 @@
           <a:noFill/>
         </p:spPr>
         <p:txBody>
-          <a:bodyPr wrap="square" tIns="25400" bIns="0" lIns="0">
+          <a:bodyPr wrap="square">
             <a:spAutoFit/>
           </a:bodyPr>
           <a:lstStyle/>
           <a:p>
             <a:pPr>
-              <a:defRPr sz="800">
+              <a:defRPr sz="1000">
                 <a:solidFill>
                   <a:srgbClr val="CCCCCC"/>
                 </a:solidFill>
@@ -3577,8 +3577,8 @@
         </p:nvSpPr>
         <p:spPr>
           <a:xfrm>
-            <a:off x="274320" y="4069080"/>
-            <a:ext cx="201168" cy="201168"/>
+            <a:off x="365760" y="4206240"/>
+            <a:ext cx="274320" cy="274320"/>
           </a:xfrm>
           <a:prstGeom prst="ellipse">
             <a:avLst/>
@@ -3609,7 +3609,7 @@
           <a:lstStyle/>
           <a:p>
             <a:pPr algn="ctr">
-              <a:defRPr sz="700" b="1">
+              <a:defRPr sz="900" b="1">
                 <a:solidFill>
                   <a:srgbClr val="FFFFFF"/>
                 </a:solidFill>
@@ -3629,8 +3629,8 @@
         </p:nvSpPr>
         <p:spPr>
           <a:xfrm>
-            <a:off x="548640" y="4023360"/>
-            <a:ext cx="6400800" cy="484631"/>
+            <a:off x="777240" y="4206240"/>
+            <a:ext cx="5943600" cy="411480"/>
           </a:xfrm>
           <a:prstGeom prst="rect">
             <a:avLst/>
@@ -3638,13 +3638,13 @@
           <a:noFill/>
         </p:spPr>
         <p:txBody>
-          <a:bodyPr wrap="square" tIns="25400" bIns="0" lIns="0">
+          <a:bodyPr wrap="square">
             <a:spAutoFit/>
           </a:bodyPr>
           <a:lstStyle/>
           <a:p>
             <a:pPr>
-              <a:defRPr sz="800">
+              <a:defRPr sz="1000">
                 <a:solidFill>
                   <a:srgbClr val="CCCCCC"/>
                 </a:solidFill>
@@ -3665,8 +3665,8 @@
         </p:nvSpPr>
         <p:spPr>
           <a:xfrm>
-            <a:off x="274320" y="4571999"/>
-            <a:ext cx="201168" cy="201168"/>
+            <a:off x="365760" y="4663440"/>
+            <a:ext cx="274320" cy="274320"/>
           </a:xfrm>
           <a:prstGeom prst="ellipse">
             <a:avLst/>
@@ -3697,7 +3697,7 @@
           <a:lstStyle/>
           <a:p>
             <a:pPr algn="ctr">
-              <a:defRPr sz="700" b="1">
+              <a:defRPr sz="900" b="1">
                 <a:solidFill>
                   <a:srgbClr val="FFFFFF"/>
                 </a:solidFill>
@@ -3717,8 +3717,8 @@
         </p:nvSpPr>
         <p:spPr>
           <a:xfrm>
-            <a:off x="548640" y="4526279"/>
-            <a:ext cx="6400800" cy="484631"/>
+            <a:off x="777240" y="4663440"/>
+            <a:ext cx="5943600" cy="411480"/>
           </a:xfrm>
           <a:prstGeom prst="rect">
             <a:avLst/>
@@ -3726,13 +3726,13 @@
           <a:noFill/>
         </p:spPr>
         <p:txBody>
-          <a:bodyPr wrap="square" tIns="25400" bIns="0" lIns="0">
+          <a:bodyPr wrap="square">
             <a:spAutoFit/>
           </a:bodyPr>
           <a:lstStyle/>
           <a:p>
             <a:pPr>
-              <a:defRPr sz="800">
+              <a:defRPr sz="1000">
                 <a:solidFill>
                   <a:srgbClr val="CCCCCC"/>
                 </a:solidFill>
@@ -4022,8 +4022,8 @@
         </p:blipFill>
         <p:spPr>
           <a:xfrm>
-            <a:off x="182880" y="1276869"/>
-            <a:ext cx="5303520" cy="3115540"/>
+            <a:off x="182880" y="2013769"/>
+            <a:ext cx="5303520" cy="1641740"/>
           </a:xfrm>
           <a:prstGeom prst="rect">
             <a:avLst/>
@@ -4158,9 +4158,9 @@
           <a:p>
             <a:pPr>
               <a:spcAft>
-                <a:spcPts val="400"/>
+                <a:spcPts val="600"/>
               </a:spcAft>
-              <a:defRPr sz="800">
+              <a:defRPr sz="900">
                 <a:solidFill>
                   <a:srgbClr val="212121"/>
                 </a:solidFill>
@@ -4168,23 +4168,7 @@
               </a:defRPr>
             </a:pPr>
             <a:r>
-              <a:t>• While Amazon CloudWatch is a monitoring service for AWS resources and applications</a:t>
-            </a:r>
-          </a:p>
-          <a:p>
-            <a:pPr>
-              <a:spcAft>
-                <a:spcPts val="400"/>
-              </a:spcAft>
-              <a:defRPr sz="800">
-                <a:solidFill>
-                  <a:srgbClr val="212121"/>
-                </a:solidFill>
-                <a:latin typeface="Segoe UI"/>
-              </a:defRPr>
-            </a:pPr>
-            <a:r>
-              <a:t>• Not directly related to creating an event-driven architecture for handling HTTP API calls and persistently storing microservices data</a:t>
+              <a:t>• While Amazon CloudWatch is a monitoring service for AWS resources and applications, it is not directly related to creating an event-driven architecture for handling HTTP API calls and persistently storing microservices data.</a:t>
             </a:r>
           </a:p>
         </p:txBody>
@@ -4363,8 +4347,8 @@
         </p:blipFill>
         <p:spPr>
           <a:xfrm>
-            <a:off x="182880" y="2000378"/>
-            <a:ext cx="5303520" cy="1668523"/>
+            <a:off x="182880" y="2079648"/>
+            <a:ext cx="5303520" cy="1509983"/>
           </a:xfrm>
           <a:prstGeom prst="rect">
             <a:avLst/>
@@ -4499,9 +4483,9 @@
           <a:p>
             <a:pPr>
               <a:spcAft>
-                <a:spcPts val="400"/>
+                <a:spcPts val="600"/>
               </a:spcAft>
-              <a:defRPr sz="800">
+              <a:defRPr sz="900">
                 <a:solidFill>
                   <a:srgbClr val="212121"/>
                 </a:solidFill>
@@ -4509,15 +4493,15 @@
               </a:defRPr>
             </a:pPr>
             <a:r>
-              <a:t>• Amazon API Gateway allows you to create, publish, maintain, monitor, and secure APIs at any scale</a:t>
+              <a:t>• Amazon API Gateway allows you to create, publish, maintain, monitor, and secure APIs at any scale.</a:t>
             </a:r>
           </a:p>
           <a:p>
             <a:pPr>
               <a:spcAft>
-                <a:spcPts val="400"/>
+                <a:spcPts val="600"/>
               </a:spcAft>
-              <a:defRPr sz="800">
+              <a:defRPr sz="900">
                 <a:solidFill>
                   <a:srgbClr val="212121"/>
                 </a:solidFill>
@@ -4525,7 +4509,7 @@
               </a:defRPr>
             </a:pPr>
             <a:r>
-              <a:t>• It enables customers to make HTTP API calls to interact with your application</a:t>
+              <a:t>• It enables customers to make HTTP API calls to interact with your application.</a:t>
             </a:r>
           </a:p>
         </p:txBody>
@@ -4704,8 +4688,8 @@
         </p:blipFill>
         <p:spPr>
           <a:xfrm>
-            <a:off x="182880" y="1049357"/>
-            <a:ext cx="5303520" cy="3570564"/>
+            <a:off x="182880" y="1821531"/>
+            <a:ext cx="5303520" cy="2026216"/>
           </a:xfrm>
           <a:prstGeom prst="rect">
             <a:avLst/>
@@ -4840,9 +4824,9 @@
           <a:p>
             <a:pPr>
               <a:spcAft>
-                <a:spcPts val="400"/>
+                <a:spcPts val="600"/>
               </a:spcAft>
-              <a:defRPr sz="800">
+              <a:defRPr sz="900">
                 <a:solidFill>
                   <a:srgbClr val="212121"/>
                 </a:solidFill>
@@ -4850,15 +4834,15 @@
               </a:defRPr>
             </a:pPr>
             <a:r>
-              <a:t>• AWS Secrets Manager is a service that helps you protect access to your applications, services, and IT resources</a:t>
+              <a:t>• AWS Secrets Manager is a service that helps you protect access to your applications, services, and IT resources.</a:t>
             </a:r>
           </a:p>
           <a:p>
             <a:pPr>
               <a:spcAft>
-                <a:spcPts val="400"/>
+                <a:spcPts val="600"/>
               </a:spcAft>
-              <a:defRPr sz="800">
+              <a:defRPr sz="900">
                 <a:solidFill>
                   <a:srgbClr val="212121"/>
                 </a:solidFill>
@@ -4866,23 +4850,7 @@
               </a:defRPr>
             </a:pPr>
             <a:r>
-              <a:t>• While it plays a crucial role in managing secrets</a:t>
-            </a:r>
-          </a:p>
-          <a:p>
-            <a:pPr>
-              <a:spcAft>
-                <a:spcPts val="400"/>
-              </a:spcAft>
-              <a:defRPr sz="800">
-                <a:solidFill>
-                  <a:srgbClr val="212121"/>
-                </a:solidFill>
-                <a:latin typeface="Segoe UI"/>
-              </a:defRPr>
-            </a:pPr>
-            <a:r>
-              <a:t>• Not directly involved in creating an event-driven architecture for handling HTTP API calls and persistently storing microservices data</a:t>
+              <a:t>• While it plays a crucial role in managing secrets, it is not directly involved in creating an event-driven architecture for handling HTTP API calls and persistently storing microservices data.</a:t>
             </a:r>
           </a:p>
         </p:txBody>
@@ -5061,8 +5029,8 @@
         </p:blipFill>
         <p:spPr>
           <a:xfrm>
-            <a:off x="182880" y="2039679"/>
-            <a:ext cx="5303520" cy="1589920"/>
+            <a:off x="182880" y="1494778"/>
+            <a:ext cx="5303520" cy="2679722"/>
           </a:xfrm>
           <a:prstGeom prst="rect">
             <a:avLst/>
@@ -5197,9 +5165,9 @@
           <a:p>
             <a:pPr>
               <a:spcAft>
-                <a:spcPts val="400"/>
+                <a:spcPts val="600"/>
               </a:spcAft>
-              <a:defRPr sz="800">
+              <a:defRPr sz="900">
                 <a:solidFill>
                   <a:srgbClr val="212121"/>
                 </a:solidFill>
@@ -5207,15 +5175,15 @@
               </a:defRPr>
             </a:pPr>
             <a:r>
-              <a:t>• Amazon DynamoDB is a fully managed NoSQL database service that provides fast and predictable performance with seamless scalability</a:t>
+              <a:t>• Amazon DynamoDB is a fully managed NoSQL database service that provides fast and predictable performance with seamless scalability.</a:t>
             </a:r>
           </a:p>
           <a:p>
             <a:pPr>
               <a:spcAft>
-                <a:spcPts val="400"/>
+                <a:spcPts val="600"/>
               </a:spcAft>
-              <a:defRPr sz="800">
+              <a:defRPr sz="900">
                 <a:solidFill>
                   <a:srgbClr val="212121"/>
                 </a:solidFill>
@@ -5223,7 +5191,7 @@
               </a:defRPr>
             </a:pPr>
             <a:r>
-              <a:t>• It can persistently store the microservices data</a:t>
+              <a:t>• It can persistently store the microservices data.</a:t>
             </a:r>
           </a:p>
         </p:txBody>
@@ -5402,8 +5370,8 @@
         </p:blipFill>
         <p:spPr>
           <a:xfrm>
-            <a:off x="182880" y="1974762"/>
-            <a:ext cx="5303520" cy="1719755"/>
+            <a:off x="182880" y="1517919"/>
+            <a:ext cx="5303520" cy="2633440"/>
           </a:xfrm>
           <a:prstGeom prst="rect">
             <a:avLst/>
@@ -5538,9 +5506,9 @@
           <a:p>
             <a:pPr>
               <a:spcAft>
-                <a:spcPts val="400"/>
+                <a:spcPts val="600"/>
               </a:spcAft>
-              <a:defRPr sz="800">
+              <a:defRPr sz="900">
                 <a:solidFill>
                   <a:srgbClr val="212121"/>
                 </a:solidFill>
@@ -5548,15 +5516,15 @@
               </a:defRPr>
             </a:pPr>
             <a:r>
-              <a:t>• AWS Lambda is a serverless compute service that runs your code in response to events and automatically scales to handle them</a:t>
+              <a:t>• AWS Lambda is a serverless compute service that runs your code in response to events and automatically scales to handle them.</a:t>
             </a:r>
           </a:p>
           <a:p>
             <a:pPr>
               <a:spcAft>
-                <a:spcPts val="400"/>
+                <a:spcPts val="600"/>
               </a:spcAft>
-              <a:defRPr sz="800">
+              <a:defRPr sz="900">
                 <a:solidFill>
                   <a:srgbClr val="212121"/>
                 </a:solidFill>
@@ -5564,7 +5532,7 @@
               </a:defRPr>
             </a:pPr>
             <a:r>
-              <a:t>• It can contain the business logic processes for handling the incoming API calls without provisioning or managing servers</a:t>
+              <a:t>• It can contain the business logic processes for handling the incoming API calls without provisioning or managing servers.</a:t>
             </a:r>
           </a:p>
         </p:txBody>
@@ -5743,8 +5711,8 @@
         </p:blipFill>
         <p:spPr>
           <a:xfrm>
-            <a:off x="182880" y="1108534"/>
-            <a:ext cx="5303520" cy="3452211"/>
+            <a:off x="182880" y="1980144"/>
+            <a:ext cx="5303520" cy="1708990"/>
           </a:xfrm>
           <a:prstGeom prst="rect">
             <a:avLst/>
@@ -5879,9 +5847,9 @@
           <a:p>
             <a:pPr>
               <a:spcAft>
-                <a:spcPts val="400"/>
+                <a:spcPts val="600"/>
               </a:spcAft>
-              <a:defRPr sz="800">
+              <a:defRPr sz="900">
                 <a:solidFill>
                   <a:srgbClr val="212121"/>
                 </a:solidFill>
@@ -5889,15 +5857,15 @@
               </a:defRPr>
             </a:pPr>
             <a:r>
-              <a:t>• AWS Elastic Beanstalk is an easy-to-use service for deploying and scaling web applications and services</a:t>
+              <a:t>• AWS Elastic Beanstalk is an easy-to-use service for deploying and scaling web applications and services.</a:t>
             </a:r>
           </a:p>
           <a:p>
             <a:pPr>
               <a:spcAft>
-                <a:spcPts val="400"/>
+                <a:spcPts val="600"/>
               </a:spcAft>
-              <a:defRPr sz="800">
+              <a:defRPr sz="900">
                 <a:solidFill>
                   <a:srgbClr val="212121"/>
                 </a:solidFill>
@@ -5905,7 +5873,7 @@
               </a:defRPr>
             </a:pPr>
             <a:r>
-              <a:t>• Not specifically designed for creating event-driven architectures or handling HTTP API calls and persistently storing microservices data in a serverless manner</a:t>
+              <a:t>• However, it is not specifically designed for creating event-driven architectures or handling HTTP API calls and persistently storing microservices data in a serverless manner.</a:t>
             </a:r>
           </a:p>
         </p:txBody>
